--- a/docs/Slide12_representative_structure.pptx
+++ b/docs/Slide12_representative_structure.pptx
@@ -1901,8 +1901,8 @@
         </p:blipFill>
         <p:spPr>
           <a:xfrm>
-            <a:off x="948856" y="2231136"/>
-            <a:ext cx="7246287" cy="2999231"/>
+            <a:off x="809590" y="2231136"/>
+            <a:ext cx="7524819" cy="2999231"/>
           </a:xfrm>
           <a:prstGeom prst="rect">
             <a:avLst/>

--- a/docs/Slide12_representative_structure.pptx
+++ b/docs/Slide12_representative_structure.pptx
@@ -1684,7 +1684,29 @@
                 <a:ea typeface="Arial"/>
                 <a:cs typeface="Arial"/>
               </a:rPr>
-              <a:t>Candidate counts differ per compound, so </a:t>
+              <a:t>Candidate counts differ </a:t>
+            </a:r>
+            <a:r>
+              <a:rPr sz="1275" b="1">
+                <a:solidFill>
+                  <a:srgbClr val="2563EB"/>
+                </a:solidFill>
+                <a:latin typeface="Arial"/>
+                <a:ea typeface="Arial"/>
+                <a:cs typeface="Arial"/>
+              </a:rPr>
+              <a:t>15 to 150</a:t>
+            </a:r>
+            <a:r>
+              <a:rPr sz="1275" b="0">
+                <a:solidFill>
+                  <a:srgbClr val="374151"/>
+                </a:solidFill>
+                <a:latin typeface="Arial"/>
+                <a:ea typeface="Arial"/>
+                <a:cs typeface="Arial"/>
+              </a:rPr>
+              <a:t> per compound, so </a:t>
             </a:r>
             <a:r>
               <a:rPr sz="1275" b="1">

--- a/docs/Slide12_representative_structure.pptx
+++ b/docs/Slide12_representative_structure.pptx
@@ -1298,7 +1298,7 @@
                 <a:ea typeface="Arial"/>
                 <a:cs typeface="Arial"/>
               </a:rPr>
-              <a:t>Representative: the one structure kept for the next steps  ·  Convergence: the optimizer actually finished</a:t>
+              <a:t>Representative: the one structure kept for the next steps  ·  Combined score: several properties folded into one number</a:t>
             </a:r>
           </a:p>
         </p:txBody>
@@ -1430,7 +1430,7 @@
                 <a:ea typeface="Arial"/>
                 <a:cs typeface="Arial"/>
               </a:rPr>
-              <a:t>Step 4: One structure per candidate is kept for the full calculations</a:t>
+              <a:t>Step 4: One structure per compound is kept for the full calculations</a:t>
             </a:r>
           </a:p>
         </p:txBody>
@@ -1546,7 +1546,7 @@
                 <a:ea typeface="Arial"/>
                 <a:cs typeface="Arial"/>
               </a:rPr>
-              <a:t>To carry one structure per compound, the </a:t>
+              <a:t>The </a:t>
             </a:r>
             <a:r>
               <a:rPr sz="1275" b="1">
@@ -1557,7 +1557,7 @@
                 <a:ea typeface="Arial"/>
                 <a:cs typeface="Arial"/>
               </a:rPr>
-              <a:t>top-ranked configuration</a:t>
+              <a:t>combined score</a:t>
             </a:r>
             <a:r>
               <a:rPr sz="1275" b="0">
@@ -1568,7 +1568,7 @@
                 <a:ea typeface="Arial"/>
                 <a:cs typeface="Arial"/>
               </a:rPr>
-              <a:t> was kept.</a:t>
+              <a:t>, not energy alone, picked which configuration was kept.</a:t>
             </a:r>
           </a:p>
         </p:txBody>
@@ -1684,7 +1684,7 @@
                 <a:ea typeface="Arial"/>
                 <a:cs typeface="Arial"/>
               </a:rPr>
-              <a:t>Candidate counts differ </a:t>
+              <a:t>Each compound produced </a:t>
             </a:r>
             <a:r>
               <a:rPr sz="1275" b="1">
@@ -1706,7 +1706,7 @@
                 <a:ea typeface="Arial"/>
                 <a:cs typeface="Arial"/>
               </a:rPr>
-              <a:t> per compound, so </a:t>
+              <a:t> candidates, so </a:t>
             </a:r>
             <a:r>
               <a:rPr sz="1275" b="1">
@@ -2014,7 +2014,7 @@
                 </a:solidFill>
                 <a:latin typeface="Arial"/>
               </a:rPr>
-              <a:t>; </a:t>
+              <a:t>; for the </a:t>
             </a:r>
             <a:r>
               <a:rPr sz="1150" b="1">
@@ -2023,7 +2023,7 @@
                 </a:solidFill>
                 <a:latin typeface="Arial"/>
               </a:rPr>
-              <a:t>6 of 88 exceed 0.10</a:t>
+              <a:t>6 of 88 above 0.10</a:t>
             </a:r>
             <a:r>
               <a:rPr sz="1150" b="0">
@@ -2032,7 +2032,7 @@
                 </a:solidFill>
                 <a:latin typeface="Arial"/>
               </a:rPr>
-              <a:t> — there the choice is real</a:t>
+              <a:t>, the choice of structure matters</a:t>
             </a:r>
           </a:p>
         </p:txBody>
